--- a/slides/01-Course-Intro.pptx
+++ b/slides/01-Course-Intro.pptx
@@ -1608,14 +1608,14 @@
         <p:spPr>
           <a:extLst>
             <a:ext uri="{909E8E84-426E-40dd-AFC4-6F175D3DCCD1}">
-              <a14:hiddenFill xmlns="" xmlns:a14="http://schemas.microsoft.com/office/drawing/2010/main">
+              <a14:hiddenFill xmlns:a14="http://schemas.microsoft.com/office/drawing/2010/main" xmlns="">
                 <a:solidFill>
                   <a:srgbClr val="FFFFFF"/>
                 </a:solidFill>
               </a14:hiddenFill>
             </a:ext>
             <a:ext uri="{91240B29-F687-4f45-9708-019B960494DF}">
-              <a14:hiddenLine xmlns="" xmlns:a14="http://schemas.microsoft.com/office/drawing/2010/main" w="9525">
+              <a14:hiddenLine xmlns:a14="http://schemas.microsoft.com/office/drawing/2010/main" xmlns="" w="9525">
                 <a:solidFill>
                   <a:srgbClr val="000000"/>
                 </a:solidFill>
@@ -1625,7 +1625,7 @@
               </a14:hiddenLine>
             </a:ext>
             <a:ext uri="{AF507438-7753-43e0-B8FC-AC1667EBCBE1}">
-              <a14:hiddenEffects xmlns="" xmlns:a14="http://schemas.microsoft.com/office/drawing/2010/main">
+              <a14:hiddenEffects xmlns:a14="http://schemas.microsoft.com/office/drawing/2010/main" xmlns="">
                 <a:effectLst>
                   <a:outerShdw blurRad="63500" dist="38099" dir="2700000" algn="ctr" rotWithShape="0">
                     <a:schemeClr val="bg2">
@@ -1636,7 +1636,7 @@
               </a14:hiddenEffects>
             </a:ext>
             <a:ext uri="{FAA26D3D-D897-4be2-8F04-BA451C77F1D7}">
-              <ma14:placeholderFlag xmlns="" xmlns:ma14="http://schemas.microsoft.com/office/mac/drawingml/2011/main" val="1"/>
+              <ma14:placeholderFlag xmlns:ma14="http://schemas.microsoft.com/office/mac/drawingml/2011/main" xmlns="" val="1"/>
             </a:ext>
           </a:extLst>
         </p:spPr>
@@ -10774,14 +10774,14 @@
         <p:spPr>
           <a:extLst>
             <a:ext uri="{909E8E84-426E-40dd-AFC4-6F175D3DCCD1}">
-              <a14:hiddenFill xmlns="" xmlns:a14="http://schemas.microsoft.com/office/drawing/2010/main">
+              <a14:hiddenFill xmlns:a14="http://schemas.microsoft.com/office/drawing/2010/main" xmlns="">
                 <a:solidFill>
                   <a:srgbClr val="FFFFFF"/>
                 </a:solidFill>
               </a14:hiddenFill>
             </a:ext>
             <a:ext uri="{91240B29-F687-4f45-9708-019B960494DF}">
-              <a14:hiddenLine xmlns="" xmlns:a14="http://schemas.microsoft.com/office/drawing/2010/main" w="9525">
+              <a14:hiddenLine xmlns:a14="http://schemas.microsoft.com/office/drawing/2010/main" xmlns="" w="9525">
                 <a:solidFill>
                   <a:srgbClr val="000000"/>
                 </a:solidFill>
@@ -10791,7 +10791,7 @@
               </a14:hiddenLine>
             </a:ext>
             <a:ext uri="{AF507438-7753-43e0-B8FC-AC1667EBCBE1}">
-              <a14:hiddenEffects xmlns="" xmlns:a14="http://schemas.microsoft.com/office/drawing/2010/main">
+              <a14:hiddenEffects xmlns:a14="http://schemas.microsoft.com/office/drawing/2010/main" xmlns="">
                 <a:effectLst>
                   <a:outerShdw blurRad="63500" dist="38099" dir="2700000" algn="ctr" rotWithShape="0">
                     <a:schemeClr val="bg2">
@@ -10802,7 +10802,7 @@
               </a14:hiddenEffects>
             </a:ext>
             <a:ext uri="{FAA26D3D-D897-4be2-8F04-BA451C77F1D7}">
-              <ma14:placeholderFlag xmlns="" xmlns:ma14="http://schemas.microsoft.com/office/mac/drawingml/2011/main" val="1"/>
+              <ma14:placeholderFlag xmlns:ma14="http://schemas.microsoft.com/office/mac/drawingml/2011/main" xmlns="" val="1"/>
             </a:ext>
           </a:extLst>
         </p:spPr>
@@ -10840,14 +10840,14 @@
         <p:spPr>
           <a:extLst>
             <a:ext uri="{909E8E84-426E-40dd-AFC4-6F175D3DCCD1}">
-              <a14:hiddenFill xmlns="" xmlns:a14="http://schemas.microsoft.com/office/drawing/2010/main">
+              <a14:hiddenFill xmlns:a14="http://schemas.microsoft.com/office/drawing/2010/main" xmlns="">
                 <a:solidFill>
                   <a:srgbClr val="FFFFFF"/>
                 </a:solidFill>
               </a14:hiddenFill>
             </a:ext>
             <a:ext uri="{91240B29-F687-4f45-9708-019B960494DF}">
-              <a14:hiddenLine xmlns="" xmlns:a14="http://schemas.microsoft.com/office/drawing/2010/main" w="9525">
+              <a14:hiddenLine xmlns:a14="http://schemas.microsoft.com/office/drawing/2010/main" xmlns="" w="9525">
                 <a:solidFill>
                   <a:srgbClr val="000000"/>
                 </a:solidFill>
@@ -10857,7 +10857,7 @@
               </a14:hiddenLine>
             </a:ext>
             <a:ext uri="{AF507438-7753-43e0-B8FC-AC1667EBCBE1}">
-              <a14:hiddenEffects xmlns="" xmlns:a14="http://schemas.microsoft.com/office/drawing/2010/main">
+              <a14:hiddenEffects xmlns:a14="http://schemas.microsoft.com/office/drawing/2010/main" xmlns="">
                 <a:effectLst>
                   <a:outerShdw blurRad="63500" dist="38099" dir="2700000" algn="ctr" rotWithShape="0">
                     <a:schemeClr val="bg2">
@@ -10868,7 +10868,7 @@
               </a14:hiddenEffects>
             </a:ext>
             <a:ext uri="{FAA26D3D-D897-4be2-8F04-BA451C77F1D7}">
-              <ma14:placeholderFlag xmlns="" xmlns:ma14="http://schemas.microsoft.com/office/mac/drawingml/2011/main" val="1"/>
+              <ma14:placeholderFlag xmlns:ma14="http://schemas.microsoft.com/office/mac/drawingml/2011/main" xmlns="" val="1"/>
             </a:ext>
           </a:extLst>
         </p:spPr>
@@ -10906,14 +10906,14 @@
         <p:spPr>
           <a:extLst>
             <a:ext uri="{909E8E84-426E-40dd-AFC4-6F175D3DCCD1}">
-              <a14:hiddenFill xmlns="" xmlns:a14="http://schemas.microsoft.com/office/drawing/2010/main">
+              <a14:hiddenFill xmlns:a14="http://schemas.microsoft.com/office/drawing/2010/main" xmlns="">
                 <a:solidFill>
                   <a:srgbClr val="FFFFFF"/>
                 </a:solidFill>
               </a14:hiddenFill>
             </a:ext>
             <a:ext uri="{91240B29-F687-4f45-9708-019B960494DF}">
-              <a14:hiddenLine xmlns="" xmlns:a14="http://schemas.microsoft.com/office/drawing/2010/main" w="9525">
+              <a14:hiddenLine xmlns:a14="http://schemas.microsoft.com/office/drawing/2010/main" xmlns="" w="9525">
                 <a:solidFill>
                   <a:srgbClr val="000000"/>
                 </a:solidFill>
@@ -10923,7 +10923,7 @@
               </a14:hiddenLine>
             </a:ext>
             <a:ext uri="{AF507438-7753-43e0-B8FC-AC1667EBCBE1}">
-              <a14:hiddenEffects xmlns="" xmlns:a14="http://schemas.microsoft.com/office/drawing/2010/main">
+              <a14:hiddenEffects xmlns:a14="http://schemas.microsoft.com/office/drawing/2010/main" xmlns="">
                 <a:effectLst>
                   <a:outerShdw blurRad="63500" dist="38099" dir="2700000" algn="ctr" rotWithShape="0">
                     <a:schemeClr val="bg2">
@@ -10934,7 +10934,7 @@
               </a14:hiddenEffects>
             </a:ext>
             <a:ext uri="{FAA26D3D-D897-4be2-8F04-BA451C77F1D7}">
-              <ma14:placeholderFlag xmlns="" xmlns:ma14="http://schemas.microsoft.com/office/mac/drawingml/2011/main" val="1"/>
+              <ma14:placeholderFlag xmlns:ma14="http://schemas.microsoft.com/office/mac/drawingml/2011/main" xmlns="" val="1"/>
             </a:ext>
           </a:extLst>
         </p:spPr>
@@ -11437,12 +11437,16 @@
               </a:tabLst>
             </a:pPr>
             <a:r>
-              <a:rPr lang="en-US" altLang="en-US" dirty="0">
+              <a:rPr lang="en-US" altLang="en-US">
                 <a:latin typeface="Arial" panose="020B0604020202020204" pitchFamily="34" charset="0"/>
                 <a:cs typeface="Arial" panose="020B0604020202020204" pitchFamily="34" charset="0"/>
               </a:rPr>
-              <a:t>John Hunt</a:t>
-            </a:r>
+              <a:t>Kevin Cunningham</a:t>
+            </a:r>
+            <a:endParaRPr lang="en-US" altLang="en-US" dirty="0">
+              <a:latin typeface="Arial" panose="020B0604020202020204" pitchFamily="34" charset="0"/>
+              <a:cs typeface="Arial" panose="020B0604020202020204" pitchFamily="34" charset="0"/>
+            </a:endParaRPr>
           </a:p>
           <a:p>
             <a:pPr lvl="1">
